--- a/blocks/F_integration/Block_F_실습결과_명령어.pptx
+++ b/blocks/F_integration/Block_F_실습결과_명령어.pptx
@@ -10,6 +10,7 @@
     <p:sldId id="258" r:id="rId9"/>
     <p:sldId id="259" r:id="rId10"/>
     <p:sldId id="260" r:id="rId11"/>
+    <p:sldId id="261" r:id="rId12"/>
   </p:sldIdLst>
   <p:sldSz cx="12191695" cy="6858000" type="screen4x3"/>
   <p:notesSz cx="6858000" cy="9144000"/>
@@ -4202,6 +4203,333 @@
               </a:defRPr>
             </a:pPr>
             <a:r>
+              <a:t>명령어 동작과 설정 포인트</a:t>
+            </a:r>
+          </a:p>
+        </p:txBody>
+      </p:sp>
+      <p:sp>
+        <p:nvSpPr>
+          <p:cNvPr id="5" name="TextBox 4"/>
+          <p:cNvSpPr txBox="1"/>
+          <p:nvPr/>
+        </p:nvSpPr>
+        <p:spPr>
+          <a:xfrm>
+            <a:off x="411480" y="6556248"/>
+            <a:ext cx="11247120" cy="164592"/>
+          </a:xfrm>
+          <a:prstGeom prst="rect">
+            <a:avLst/>
+          </a:prstGeom>
+          <a:noFill/>
+        </p:spPr>
+        <p:txBody>
+          <a:bodyPr wrap="square" anchor="t">
+            <a:spAutoFit/>
+          </a:bodyPr>
+          <a:lstStyle/>
+          <a:p>
+            <a:pPr>
+              <a:spcAft>
+                <a:spcPts val="500"/>
+              </a:spcAft>
+              <a:defRPr sz="1000" b="0">
+                <a:solidFill>
+                  <a:srgbClr val="667080"/>
+                </a:solidFill>
+                <a:latin typeface="Noto Sans CJK KR"/>
+              </a:defRPr>
+            </a:pPr>
+            <a:r>
+              <a:t>ROS 2 + Gazebo AGV 실습 · 모든 텍스트 최소 10pt</a:t>
+            </a:r>
+          </a:p>
+        </p:txBody>
+      </p:sp>
+      <p:sp>
+        <p:nvSpPr>
+          <p:cNvPr id="6" name="TextBox 5"/>
+          <p:cNvSpPr txBox="1"/>
+          <p:nvPr/>
+        </p:nvSpPr>
+        <p:spPr>
+          <a:xfrm>
+            <a:off x="594360" y="960120"/>
+            <a:ext cx="10972800" cy="411480"/>
+          </a:xfrm>
+          <a:prstGeom prst="rect">
+            <a:avLst/>
+          </a:prstGeom>
+          <a:noFill/>
+        </p:spPr>
+        <p:txBody>
+          <a:bodyPr wrap="square" anchor="t">
+            <a:spAutoFit/>
+          </a:bodyPr>
+          <a:lstStyle/>
+          <a:p>
+            <a:pPr>
+              <a:spcAft>
+                <a:spcPts val="500"/>
+              </a:spcAft>
+              <a:defRPr sz="2100" b="1">
+                <a:solidFill>
+                  <a:srgbClr val="173E6F"/>
+                </a:solidFill>
+                <a:latin typeface="Noto Sans CJK KR"/>
+              </a:defRPr>
+            </a:pPr>
+            <a:r>
+              <a:t>이 명령이 실제로 하는 일</a:t>
+            </a:r>
+          </a:p>
+        </p:txBody>
+      </p:sp>
+      <p:sp>
+        <p:nvSpPr>
+          <p:cNvPr id="7" name="TextBox 6"/>
+          <p:cNvSpPr txBox="1"/>
+          <p:nvPr/>
+        </p:nvSpPr>
+        <p:spPr>
+          <a:xfrm>
+            <a:off x="731520" y="1508760"/>
+            <a:ext cx="10698480" cy="4480560"/>
+          </a:xfrm>
+          <a:prstGeom prst="rect">
+            <a:avLst/>
+          </a:prstGeom>
+          <a:noFill/>
+        </p:spPr>
+        <p:txBody>
+          <a:bodyPr wrap="square" anchor="t">
+            <a:spAutoFit/>
+          </a:bodyPr>
+          <a:lstStyle/>
+          <a:p>
+            <a:pPr>
+              <a:spcAft>
+                <a:spcPts val="500"/>
+              </a:spcAft>
+              <a:defRPr sz="1500" b="0">
+                <a:solidFill>
+                  <a:srgbClr val="212B3D"/>
+                </a:solidFill>
+                <a:latin typeface="Noto Sans CJK KR"/>
+              </a:defRPr>
+            </a:pPr>
+            <a:r>
+              <a:t>• colcon build는 8개 패키지를 의존성 순서로 install하고, source는 새 overlay를 현재 셸에 적용한다.</a:t>
+            </a:r>
+          </a:p>
+          <a:p>
+            <a:pPr>
+              <a:spcAft>
+                <a:spcPts val="500"/>
+              </a:spcAft>
+              <a:defRPr sz="1500" b="0">
+                <a:solidFill>
+                  <a:srgbClr val="212B3D"/>
+                </a:solidFill>
+                <a:latin typeface="Noto Sans CJK KR"/>
+              </a:defRPr>
+            </a:pPr>
+            <a:r>
+              <a:t>• agv_sim.launch.py는 Gazebo·bridge·TF·sensor·mission·safety를 한 명령으로 조립한다. rviz:=false로 GUI만 제외할 수 있다.</a:t>
+            </a:r>
+          </a:p>
+          <a:p>
+            <a:pPr>
+              <a:spcAft>
+                <a:spcPts val="500"/>
+              </a:spcAft>
+              <a:defRPr sz="1500" b="0">
+                <a:solidFill>
+                  <a:srgbClr val="212B3D"/>
+                </a:solidFill>
+                <a:latin typeface="Noto Sans CJK KR"/>
+              </a:defRPr>
+            </a:pPr>
+            <a:r>
+              <a:t>• ros2 bag record는 지정 토픽을 기록하며, --clock 재생은 use_sim_time 노드와 함께 사용한다.</a:t>
+            </a:r>
+          </a:p>
+        </p:txBody>
+      </p:sp>
+      <p:sp>
+        <p:nvSpPr>
+          <p:cNvPr id="8" name="TextBox 7"/>
+          <p:cNvSpPr txBox="1"/>
+          <p:nvPr/>
+        </p:nvSpPr>
+        <p:spPr>
+          <a:xfrm>
+            <a:off x="731520" y="5440680"/>
+            <a:ext cx="10698480" cy="502920"/>
+          </a:xfrm>
+          <a:prstGeom prst="rect">
+            <a:avLst/>
+          </a:prstGeom>
+          <a:noFill/>
+        </p:spPr>
+        <p:txBody>
+          <a:bodyPr wrap="square" anchor="t">
+            <a:spAutoFit/>
+          </a:bodyPr>
+          <a:lstStyle/>
+          <a:p>
+            <a:pPr>
+              <a:spcAft>
+                <a:spcPts val="500"/>
+              </a:spcAft>
+              <a:defRPr sz="1200" b="0">
+                <a:solidFill>
+                  <a:srgbClr val="3F5373"/>
+                </a:solidFill>
+                <a:latin typeface="Noto Sans CJK KR"/>
+              </a:defRPr>
+            </a:pPr>
+            <a:r>
+              <a:t>수치·토픽·방향을 바꿀 때는 해당 Block의 Mxx README에서 구현 파일과 기대 결과를 함께 확인합니다.</a:t>
+            </a:r>
+          </a:p>
+        </p:txBody>
+      </p:sp>
+    </p:spTree>
+  </p:cSld>
+  <p:clrMapOvr>
+    <a:masterClrMapping/>
+  </p:clrMapOvr>
+</p:sld>
+</file>
+
+<file path=ppt/slides/slide5.xml><?xml version="1.0" encoding="utf-8"?>
+<p:sld xmlns:a="http://schemas.openxmlformats.org/drawingml/2006/main" xmlns:p="http://schemas.openxmlformats.org/presentationml/2006/main" xmlns:r="http://schemas.openxmlformats.org/officeDocument/2006/relationships">
+  <p:cSld>
+    <p:spTree>
+      <p:nvGrpSpPr>
+        <p:cNvPr id="1" name=""/>
+        <p:cNvGrpSpPr/>
+        <p:nvPr/>
+      </p:nvGrpSpPr>
+      <p:grpSpPr/>
+      <p:sp>
+        <p:nvSpPr>
+          <p:cNvPr id="2" name="Rectangle 1"/>
+          <p:cNvSpPr/>
+          <p:nvPr/>
+        </p:nvSpPr>
+        <p:spPr>
+          <a:xfrm>
+            <a:off x="0" y="0"/>
+            <a:ext cx="12191695" cy="749808"/>
+          </a:xfrm>
+          <a:prstGeom prst="rect">
+            <a:avLst/>
+          </a:prstGeom>
+          <a:solidFill>
+            <a:srgbClr val="173E6F"/>
+          </a:solidFill>
+          <a:ln>
+            <a:noFill/>
+          </a:ln>
+        </p:spPr>
+        <p:style>
+          <a:lnRef idx="1">
+            <a:schemeClr val="accent1"/>
+          </a:lnRef>
+          <a:fillRef idx="3">
+            <a:schemeClr val="accent1"/>
+          </a:fillRef>
+          <a:effectRef idx="2">
+            <a:schemeClr val="accent1"/>
+          </a:effectRef>
+          <a:fontRef idx="minor">
+            <a:schemeClr val="lt1"/>
+          </a:fontRef>
+        </p:style>
+        <p:txBody>
+          <a:bodyPr rtlCol="0" anchor="ctr"/>
+          <a:lstStyle/>
+          <a:p>
+            <a:pPr algn="ctr"/>
+          </a:p>
+        </p:txBody>
+      </p:sp>
+      <p:sp>
+        <p:nvSpPr>
+          <p:cNvPr id="3" name="TextBox 2"/>
+          <p:cNvSpPr txBox="1"/>
+          <p:nvPr/>
+        </p:nvSpPr>
+        <p:spPr>
+          <a:xfrm>
+            <a:off x="411480" y="137160"/>
+            <a:ext cx="8046720" cy="320040"/>
+          </a:xfrm>
+          <a:prstGeom prst="rect">
+            <a:avLst/>
+          </a:prstGeom>
+          <a:noFill/>
+        </p:spPr>
+        <p:txBody>
+          <a:bodyPr wrap="square" anchor="t">
+            <a:spAutoFit/>
+          </a:bodyPr>
+          <a:lstStyle/>
+          <a:p>
+            <a:pPr>
+              <a:spcAft>
+                <a:spcPts val="500"/>
+              </a:spcAft>
+              <a:defRPr sz="2500" b="1">
+                <a:solidFill>
+                  <a:srgbClr val="FFFFFF"/>
+                </a:solidFill>
+                <a:latin typeface="Noto Sans CJK KR"/>
+              </a:defRPr>
+            </a:pPr>
+            <a:r>
+              <a:t>Block F — 통합·재현·최종 프로젝트</a:t>
+            </a:r>
+          </a:p>
+        </p:txBody>
+      </p:sp>
+      <p:sp>
+        <p:nvSpPr>
+          <p:cNvPr id="4" name="TextBox 3"/>
+          <p:cNvSpPr txBox="1"/>
+          <p:nvPr/>
+        </p:nvSpPr>
+        <p:spPr>
+          <a:xfrm>
+            <a:off x="8321040" y="182880"/>
+            <a:ext cx="3474720" cy="256032"/>
+          </a:xfrm>
+          <a:prstGeom prst="rect">
+            <a:avLst/>
+          </a:prstGeom>
+          <a:noFill/>
+        </p:spPr>
+        <p:txBody>
+          <a:bodyPr wrap="square" anchor="t">
+            <a:spAutoFit/>
+          </a:bodyPr>
+          <a:lstStyle/>
+          <a:p>
+            <a:pPr>
+              <a:spcAft>
+                <a:spcPts val="500"/>
+              </a:spcAft>
+              <a:defRPr sz="1000" b="0">
+                <a:solidFill>
+                  <a:srgbClr val="DCEAFC"/>
+                </a:solidFill>
+                <a:latin typeface="Noto Sans CJK KR"/>
+              </a:defRPr>
+            </a:pPr>
+            <a:r>
               <a:t>실제 실행 결과</a:t>
             </a:r>
           </a:p>
@@ -4278,7 +4606,7 @@
 </p:sld>
 </file>
 
-<file path=ppt/slides/slide5.xml><?xml version="1.0" encoding="utf-8"?>
+<file path=ppt/slides/slide6.xml><?xml version="1.0" encoding="utf-8"?>
 <p:sld xmlns:a="http://schemas.openxmlformats.org/drawingml/2006/main" xmlns:p="http://schemas.openxmlformats.org/presentationml/2006/main" xmlns:r="http://schemas.openxmlformats.org/officeDocument/2006/relationships">
   <p:cSld>
     <p:spTree>

--- a/blocks/F_integration/Block_F_실습결과_명령어.pptx
+++ b/blocks/F_integration/Block_F_실습결과_명령어.pptx
@@ -11,6 +11,8 @@
     <p:sldId id="259" r:id="rId10"/>
     <p:sldId id="260" r:id="rId11"/>
     <p:sldId id="261" r:id="rId12"/>
+    <p:sldId id="262" r:id="rId13"/>
+    <p:sldId id="263" r:id="rId14"/>
   </p:sldIdLst>
   <p:sldSz cx="12191695" cy="6858000" type="screen4x3"/>
   <p:notesSz cx="6858000" cy="9144000"/>
@@ -3256,7 +3258,7 @@
               </a:defRPr>
             </a:pPr>
             <a:r>
-              <a:t>YAML과 하나의 launch 명령으로 전체 시스템을 재현하고 rosbag으로 주행을 기록한다.</a:t>
+              <a:t>YAML과 하나의 launch 명령으로 8개 최종 AGV 패키지를 재현하고 rosbag으로 주행을 기록한다.</a:t>
             </a:r>
           </a:p>
         </p:txBody>
@@ -3793,7 +3795,7 @@
               </a:defRPr>
             </a:pPr>
             <a:r>
-              <a:t>명령어 실행 순서</a:t>
+              <a:t>초심자 파일 제작 실습 1/2</a:t>
             </a:r>
           </a:p>
         </p:txBody>
@@ -3845,8 +3847,8 @@
         </p:nvSpPr>
         <p:spPr>
           <a:xfrm>
-            <a:off x="594360" y="932688"/>
-            <a:ext cx="10972800" cy="320040"/>
+            <a:off x="502920" y="841248"/>
+            <a:ext cx="11064240" cy="274320"/>
           </a:xfrm>
           <a:prstGeom prst="rect">
             <a:avLst/>
@@ -3863,7 +3865,7 @@
               <a:spcAft>
                 <a:spcPts val="500"/>
               </a:spcAft>
-              <a:defRPr sz="2100" b="1">
+              <a:defRPr sz="1900" b="1">
                 <a:solidFill>
                   <a:srgbClr val="173E6F"/>
                 </a:solidFill>
@@ -3871,21 +3873,99 @@
               </a:defRPr>
             </a:pPr>
             <a:r>
-              <a:t>권장 실행 순서</a:t>
-            </a:r>
-          </a:p>
-        </p:txBody>
-      </p:sp>
-      <p:sp>
-        <p:nvSpPr>
-          <p:cNvPr id="7" name="Rounded Rectangle 6"/>
+              <a:t>숫자를 YAML 설정으로 분리하기 (.yaml)</a:t>
+            </a:r>
+          </a:p>
+        </p:txBody>
+      </p:sp>
+      <p:sp>
+        <p:nvSpPr>
+          <p:cNvPr id="7" name="TextBox 6"/>
+          <p:cNvSpPr txBox="1"/>
+          <p:nvPr/>
+        </p:nvSpPr>
+        <p:spPr>
+          <a:xfrm>
+            <a:off x="530352" y="1161288"/>
+            <a:ext cx="10972800" cy="201168"/>
+          </a:xfrm>
+          <a:prstGeom prst="rect">
+            <a:avLst/>
+          </a:prstGeom>
+          <a:noFill/>
+        </p:spPr>
+        <p:txBody>
+          <a:bodyPr wrap="square" anchor="t">
+            <a:spAutoFit/>
+          </a:bodyPr>
+          <a:lstStyle/>
+          <a:p>
+            <a:pPr>
+              <a:spcAft>
+                <a:spcPts val="500"/>
+              </a:spcAft>
+              <a:defRPr sz="1100" b="0">
+                <a:solidFill>
+                  <a:srgbClr val="4C5B74"/>
+                </a:solidFill>
+                <a:latin typeface="Noto Sans CJK KR"/>
+              </a:defRPr>
+            </a:pPr>
+            <a:r>
+              <a:t>실제 파일: agv_ws/src/agv_bringup/config/mission.yaml</a:t>
+            </a:r>
+          </a:p>
+        </p:txBody>
+      </p:sp>
+      <p:sp>
+        <p:nvSpPr>
+          <p:cNvPr id="8" name="TextBox 7"/>
+          <p:cNvSpPr txBox="1"/>
+          <p:nvPr/>
+        </p:nvSpPr>
+        <p:spPr>
+          <a:xfrm>
+            <a:off x="530352" y="1362456"/>
+            <a:ext cx="10972800" cy="182880"/>
+          </a:xfrm>
+          <a:prstGeom prst="rect">
+            <a:avLst/>
+          </a:prstGeom>
+          <a:noFill/>
+        </p:spPr>
+        <p:txBody>
+          <a:bodyPr wrap="square" anchor="t">
+            <a:spAutoFit/>
+          </a:bodyPr>
+          <a:lstStyle/>
+          <a:p>
+            <a:pPr>
+              <a:spcAft>
+                <a:spcPts val="500"/>
+              </a:spcAft>
+              <a:defRPr sz="1000" b="0">
+                <a:solidFill>
+                  <a:srgbClr val="17638C"/>
+                </a:solidFill>
+                <a:latin typeface="Noto Sans CJK KR"/>
+              </a:defRPr>
+            </a:pPr>
+            <a:r>
+              <a:t>처음 만들 때: mkdir -p agv_bringup/config  # node별 YAML을 config/에 저장</a:t>
+            </a:r>
+          </a:p>
+        </p:txBody>
+      </p:sp>
+      <p:sp>
+        <p:nvSpPr>
+          <p:cNvPr id="9" name="Rounded Rectangle 8"/>
           <p:cNvSpPr/>
           <p:nvPr/>
         </p:nvSpPr>
         <p:spPr>
           <a:xfrm>
-            <a:off x="594360" y="1417320"/>
-            <a:ext cx="10972800" cy="4526280"/>
+            <a:off x="502920" y="1627632"/>
+            <a:ext cx="5806440" cy="4416552"/>
           </a:xfrm>
           <a:prstGeom prst="roundRect">
             <a:avLst/>
@@ -3914,14 +3994,14 @@
           </a:fontRef>
         </p:style>
         <p:txBody>
-          <a:bodyPr rtlCol="0" anchor="ctr" lIns="237744" tIns="182880"/>
+          <a:bodyPr rtlCol="0" anchor="ctr" lIns="182880" tIns="137160"/>
           <a:lstStyle/>
           <a:p>
             <a:pPr algn="ctr">
               <a:spcAft>
-                <a:spcPts val="700"/>
-              </a:spcAft>
-              <a:defRPr sz="1100">
+                <a:spcPts val="300"/>
+              </a:spcAft>
+              <a:defRPr sz="1000">
                 <a:solidFill>
                   <a:srgbClr val="DFEDFF"/>
                 </a:solidFill>
@@ -3929,15 +4009,15 @@
               </a:defRPr>
             </a:pPr>
             <a:r>
-              <a:t>export PATH=/usr/bin:/bin:$PATH  # Miniconda 사용 시</a:t>
-            </a:r>
-          </a:p>
-          <a:p>
-            <a:pPr>
-              <a:spcAft>
-                <a:spcPts val="700"/>
-              </a:spcAft>
-              <a:defRPr sz="1100">
+              <a:t>mission_manager:</a:t>
+            </a:r>
+          </a:p>
+          <a:p>
+            <a:pPr>
+              <a:spcAft>
+                <a:spcPts val="300"/>
+              </a:spcAft>
+              <a:defRPr sz="1000">
                 <a:solidFill>
                   <a:srgbClr val="DFEDFF"/>
                 </a:solidFill>
@@ -3945,15 +4025,15 @@
               </a:defRPr>
             </a:pPr>
             <a:r>
-              <a:t>source /opt/ros/jazzy/setup.bash</a:t>
-            </a:r>
-          </a:p>
-          <a:p>
-            <a:pPr>
-              <a:spcAft>
-                <a:spcPts val="700"/>
-              </a:spcAft>
-              <a:defRPr sz="1100">
+              <a:t>  ros__parameters:</a:t>
+            </a:r>
+          </a:p>
+          <a:p>
+            <a:pPr>
+              <a:spcAft>
+                <a:spcPts val="300"/>
+              </a:spcAft>
+              <a:defRPr sz="1000">
                 <a:solidFill>
                   <a:srgbClr val="DFEDFF"/>
                 </a:solidFill>
@@ -3961,15 +4041,15 @@
               </a:defRPr>
             </a:pPr>
             <a:r>
-              <a:t>cd /home/lab4090/ros2_curri/agv_ws</a:t>
-            </a:r>
-          </a:p>
-          <a:p>
-            <a:pPr>
-              <a:spcAft>
-                <a:spcPts val="700"/>
-              </a:spcAft>
-              <a:defRPr sz="1100">
+              <a:t>    use_sim_time: true</a:t>
+            </a:r>
+          </a:p>
+          <a:p>
+            <a:pPr>
+              <a:spcAft>
+                <a:spcPts val="300"/>
+              </a:spcAft>
+              <a:defRPr sz="1000">
                 <a:solidFill>
                   <a:srgbClr val="DFEDFF"/>
                 </a:solidFill>
@@ -3977,15 +4057,15 @@
               </a:defRPr>
             </a:pPr>
             <a:r>
-              <a:t>colcon build --symlink-install --cmake-args -DPython3_EXECUTABLE=/usr/bin/python3</a:t>
-            </a:r>
-          </a:p>
-          <a:p>
-            <a:pPr>
-              <a:spcAft>
-                <a:spcPts val="700"/>
-              </a:spcAft>
-              <a:defRPr sz="1100">
+              <a:t>    stop_distance: 0.50</a:t>
+            </a:r>
+          </a:p>
+          <a:p>
+            <a:pPr>
+              <a:spcAft>
+                <a:spcPts val="300"/>
+              </a:spcAft>
+              <a:defRPr sz="1000">
                 <a:solidFill>
                   <a:srgbClr val="DFEDFF"/>
                 </a:solidFill>
@@ -3993,15 +4073,15 @@
               </a:defRPr>
             </a:pPr>
             <a:r>
-              <a:t>source install/setup.bash</a:t>
-            </a:r>
-          </a:p>
-          <a:p>
-            <a:pPr>
-              <a:spcAft>
-                <a:spcPts val="700"/>
-              </a:spcAft>
-              <a:defRPr sz="1100">
+              <a:t>    search_speed: 0.25</a:t>
+            </a:r>
+          </a:p>
+          <a:p>
+            <a:pPr>
+              <a:spcAft>
+                <a:spcPts val="300"/>
+              </a:spcAft>
+              <a:defRPr sz="1000">
                 <a:solidFill>
                   <a:srgbClr val="DFEDFF"/>
                 </a:solidFill>
@@ -4009,15 +4089,15 @@
               </a:defRPr>
             </a:pPr>
             <a:r>
-              <a:t>ros2 launch agv_bringup agv_sim.launch.py</a:t>
-            </a:r>
-          </a:p>
-          <a:p>
-            <a:pPr>
-              <a:spcAft>
-                <a:spcPts val="700"/>
-              </a:spcAft>
-              <a:defRPr sz="1100">
+              <a:t>    approach_speed: 0.15</a:t>
+            </a:r>
+          </a:p>
+          <a:p>
+            <a:pPr>
+              <a:spcAft>
+                <a:spcPts val="300"/>
+              </a:spcAft>
+              <a:defRPr sz="1000">
                 <a:solidFill>
                   <a:srgbClr val="DFEDFF"/>
                 </a:solidFill>
@@ -4025,21 +4105,69 @@
               </a:defRPr>
             </a:pPr>
             <a:r>
-              <a:t>ros2 bag record -o ~/agv_bag_01 /scan /imu/data /odom /camera/image_raw</a:t>
-            </a:r>
-          </a:p>
-        </p:txBody>
-      </p:sp>
-      <p:sp>
-        <p:nvSpPr>
-          <p:cNvPr id="8" name="TextBox 7"/>
+              <a:t>    image_center_x: 320</a:t>
+            </a:r>
+          </a:p>
+          <a:p>
+            <a:pPr>
+              <a:spcAft>
+                <a:spcPts val="300"/>
+              </a:spcAft>
+              <a:defRPr sz="1000">
+                <a:solidFill>
+                  <a:srgbClr val="DFEDFF"/>
+                </a:solidFill>
+                <a:latin typeface="Noto Sans CJK KR"/>
+              </a:defRPr>
+            </a:pPr>
+            <a:r>
+              <a:t>safety_controller:</a:t>
+            </a:r>
+          </a:p>
+          <a:p>
+            <a:pPr>
+              <a:spcAft>
+                <a:spcPts val="300"/>
+              </a:spcAft>
+              <a:defRPr sz="1000">
+                <a:solidFill>
+                  <a:srgbClr val="DFEDFF"/>
+                </a:solidFill>
+                <a:latin typeface="Noto Sans CJK KR"/>
+              </a:defRPr>
+            </a:pPr>
+            <a:r>
+              <a:t>  ros__parameters:</a:t>
+            </a:r>
+          </a:p>
+          <a:p>
+            <a:pPr>
+              <a:spcAft>
+                <a:spcPts val="300"/>
+              </a:spcAft>
+              <a:defRPr sz="1000">
+                <a:solidFill>
+                  <a:srgbClr val="DFEDFF"/>
+                </a:solidFill>
+                <a:latin typeface="Noto Sans CJK KR"/>
+              </a:defRPr>
+            </a:pPr>
+            <a:r>
+              <a:t>    stop_distance: 0.50</a:t>
+            </a:r>
+          </a:p>
+        </p:txBody>
+      </p:sp>
+      <p:sp>
+        <p:nvSpPr>
+          <p:cNvPr id="10" name="TextBox 9"/>
           <p:cNvSpPr txBox="1"/>
           <p:nvPr/>
         </p:nvSpPr>
         <p:spPr>
           <a:xfrm>
-            <a:off x="685800" y="6089904"/>
-            <a:ext cx="10789920" cy="256032"/>
+            <a:off x="6537960" y="1627632"/>
+            <a:ext cx="4892040" cy="320040"/>
           </a:xfrm>
           <a:prstGeom prst="rect">
             <a:avLst/>
@@ -4056,15 +4184,164 @@
               <a:spcAft>
                 <a:spcPts val="500"/>
               </a:spcAft>
-              <a:defRPr sz="1000" b="0">
-                <a:solidFill>
-                  <a:srgbClr val="505C70"/>
-                </a:solidFill>
-                <a:latin typeface="Noto Sans CJK KR"/>
-              </a:defRPr>
-            </a:pPr>
-            <a:r>
-              <a:t>명령은 Block README의 순서와 동일합니다. 새 터미널에서도 ROS와 workspace를 source해야 합니다.</a:t>
+              <a:defRPr sz="1600" b="1">
+                <a:solidFill>
+                  <a:srgbClr val="173E6F"/>
+                </a:solidFill>
+                <a:latin typeface="Noto Sans CJK KR"/>
+              </a:defRPr>
+            </a:pPr>
+            <a:r>
+              <a:t>만드는 순서</a:t>
+            </a:r>
+          </a:p>
+        </p:txBody>
+      </p:sp>
+      <p:sp>
+        <p:nvSpPr>
+          <p:cNvPr id="11" name="TextBox 10"/>
+          <p:cNvSpPr txBox="1"/>
+          <p:nvPr/>
+        </p:nvSpPr>
+        <p:spPr>
+          <a:xfrm>
+            <a:off x="6565392" y="1975104"/>
+            <a:ext cx="4800600" cy="2258568"/>
+          </a:xfrm>
+          <a:prstGeom prst="rect">
+            <a:avLst/>
+          </a:prstGeom>
+          <a:noFill/>
+        </p:spPr>
+        <p:txBody>
+          <a:bodyPr wrap="square" anchor="t">
+            <a:spAutoFit/>
+          </a:bodyPr>
+          <a:lstStyle/>
+          <a:p>
+            <a:pPr>
+              <a:spcAft>
+                <a:spcPts val="500"/>
+              </a:spcAft>
+              <a:defRPr sz="1200" b="0">
+                <a:solidFill>
+                  <a:srgbClr val="212B3D"/>
+                </a:solidFill>
+                <a:latin typeface="Noto Sans CJK KR"/>
+              </a:defRPr>
+            </a:pPr>
+            <a:r>
+              <a:t>• 1. node 이름을 최상위 key로 쓰고 ros__parameters 아래에 값만 둡니다.</a:t>
+            </a:r>
+          </a:p>
+          <a:p>
+            <a:pPr>
+              <a:spcAft>
+                <a:spcPts val="500"/>
+              </a:spcAft>
+              <a:defRPr sz="1200" b="0">
+                <a:solidFill>
+                  <a:srgbClr val="212B3D"/>
+                </a:solidFill>
+                <a:latin typeface="Noto Sans CJK KR"/>
+              </a:defRPr>
+            </a:pPr>
+            <a:r>
+              <a:t>• 2. 코드의 declare_parameter 이름과 YAML key 철자를 정확히 맞춥니다.</a:t>
+            </a:r>
+          </a:p>
+          <a:p>
+            <a:pPr>
+              <a:spcAft>
+                <a:spcPts val="500"/>
+              </a:spcAft>
+              <a:defRPr sz="1200" b="0">
+                <a:solidFill>
+                  <a:srgbClr val="212B3D"/>
+                </a:solidFill>
+                <a:latin typeface="Noto Sans CJK KR"/>
+              </a:defRPr>
+            </a:pPr>
+            <a:r>
+              <a:t>• 3. 숫자를 바꾼 뒤 launch를 다시 시작해 코드 수정 없이 동작을 비교합니다.</a:t>
+            </a:r>
+          </a:p>
+        </p:txBody>
+      </p:sp>
+      <p:sp>
+        <p:nvSpPr>
+          <p:cNvPr id="12" name="TextBox 11"/>
+          <p:cNvSpPr txBox="1"/>
+          <p:nvPr/>
+        </p:nvSpPr>
+        <p:spPr>
+          <a:xfrm>
+            <a:off x="6565392" y="4480560"/>
+            <a:ext cx="4800600" cy="320040"/>
+          </a:xfrm>
+          <a:prstGeom prst="rect">
+            <a:avLst/>
+          </a:prstGeom>
+          <a:noFill/>
+        </p:spPr>
+        <p:txBody>
+          <a:bodyPr wrap="square" anchor="t">
+            <a:spAutoFit/>
+          </a:bodyPr>
+          <a:lstStyle/>
+          <a:p>
+            <a:pPr>
+              <a:spcAft>
+                <a:spcPts val="500"/>
+              </a:spcAft>
+              <a:defRPr sz="1600" b="1">
+                <a:solidFill>
+                  <a:srgbClr val="173E6F"/>
+                </a:solidFill>
+                <a:latin typeface="Noto Sans CJK KR"/>
+              </a:defRPr>
+            </a:pPr>
+            <a:r>
+              <a:t>실행하면 이렇게 됩니다</a:t>
+            </a:r>
+          </a:p>
+        </p:txBody>
+      </p:sp>
+      <p:sp>
+        <p:nvSpPr>
+          <p:cNvPr id="13" name="TextBox 12"/>
+          <p:cNvSpPr txBox="1"/>
+          <p:nvPr/>
+        </p:nvSpPr>
+        <p:spPr>
+          <a:xfrm>
+            <a:off x="6565392" y="4892040"/>
+            <a:ext cx="4800600" cy="822960"/>
+          </a:xfrm>
+          <a:prstGeom prst="rect">
+            <a:avLst/>
+          </a:prstGeom>
+          <a:noFill/>
+        </p:spPr>
+        <p:txBody>
+          <a:bodyPr wrap="square" anchor="t">
+            <a:spAutoFit/>
+          </a:bodyPr>
+          <a:lstStyle/>
+          <a:p>
+            <a:pPr>
+              <a:spcAft>
+                <a:spcPts val="500"/>
+              </a:spcAft>
+              <a:defRPr sz="1200" b="0">
+                <a:solidFill>
+                  <a:srgbClr val="212B3D"/>
+                </a:solidFill>
+                <a:latin typeface="Noto Sans CJK KR"/>
+              </a:defRPr>
+            </a:pPr>
+            <a:r>
+              <a:t>같은 0.50 m 정지 거리가 FSM과 safety node에 전달돼 서로 다른 기준으로 움직이지 않습니다.</a:t>
             </a:r>
           </a:p>
         </p:txBody>
@@ -4203,7 +4480,7 @@
               </a:defRPr>
             </a:pPr>
             <a:r>
-              <a:t>명령어 동작과 설정 포인트</a:t>
+              <a:t>초심자 파일 제작 실습 2/2</a:t>
             </a:r>
           </a:p>
         </p:txBody>
@@ -4255,8 +4532,8 @@
         </p:nvSpPr>
         <p:spPr>
           <a:xfrm>
-            <a:off x="594360" y="960120"/>
-            <a:ext cx="10972800" cy="411480"/>
+            <a:off x="502920" y="841248"/>
+            <a:ext cx="11064240" cy="274320"/>
           </a:xfrm>
           <a:prstGeom prst="rect">
             <a:avLst/>
@@ -4273,7 +4550,7 @@
               <a:spcAft>
                 <a:spcPts val="500"/>
               </a:spcAft>
-              <a:defRPr sz="2100" b="1">
+              <a:defRPr sz="1900" b="1">
                 <a:solidFill>
                   <a:srgbClr val="173E6F"/>
                 </a:solidFill>
@@ -4281,7 +4558,7 @@
               </a:defRPr>
             </a:pPr>
             <a:r>
-              <a:t>이 명령이 실제로 하는 일</a:t>
+              <a:t>여러 노드를 한 명령으로 실행하기 (launch.py)</a:t>
             </a:r>
           </a:p>
         </p:txBody>
@@ -4294,8 +4571,8 @@
         </p:nvSpPr>
         <p:spPr>
           <a:xfrm>
-            <a:off x="731520" y="1508760"/>
-            <a:ext cx="10698480" cy="4480560"/>
+            <a:off x="530352" y="1161288"/>
+            <a:ext cx="10972800" cy="201168"/>
           </a:xfrm>
           <a:prstGeom prst="rect">
             <a:avLst/>
@@ -4312,47 +4589,15 @@
               <a:spcAft>
                 <a:spcPts val="500"/>
               </a:spcAft>
-              <a:defRPr sz="1500" b="0">
-                <a:solidFill>
-                  <a:srgbClr val="212B3D"/>
-                </a:solidFill>
-                <a:latin typeface="Noto Sans CJK KR"/>
-              </a:defRPr>
-            </a:pPr>
-            <a:r>
-              <a:t>• colcon build는 8개 패키지를 의존성 순서로 install하고, source는 새 overlay를 현재 셸에 적용한다.</a:t>
-            </a:r>
-          </a:p>
-          <a:p>
-            <a:pPr>
-              <a:spcAft>
-                <a:spcPts val="500"/>
-              </a:spcAft>
-              <a:defRPr sz="1500" b="0">
-                <a:solidFill>
-                  <a:srgbClr val="212B3D"/>
-                </a:solidFill>
-                <a:latin typeface="Noto Sans CJK KR"/>
-              </a:defRPr>
-            </a:pPr>
-            <a:r>
-              <a:t>• agv_sim.launch.py는 Gazebo·bridge·TF·sensor·mission·safety를 한 명령으로 조립한다. rviz:=false로 GUI만 제외할 수 있다.</a:t>
-            </a:r>
-          </a:p>
-          <a:p>
-            <a:pPr>
-              <a:spcAft>
-                <a:spcPts val="500"/>
-              </a:spcAft>
-              <a:defRPr sz="1500" b="0">
-                <a:solidFill>
-                  <a:srgbClr val="212B3D"/>
-                </a:solidFill>
-                <a:latin typeface="Noto Sans CJK KR"/>
-              </a:defRPr>
-            </a:pPr>
-            <a:r>
-              <a:t>• ros2 bag record는 지정 토픽을 기록하며, --clock 재생은 use_sim_time 노드와 함께 사용한다.</a:t>
+              <a:defRPr sz="1100" b="0">
+                <a:solidFill>
+                  <a:srgbClr val="4C5B74"/>
+                </a:solidFill>
+                <a:latin typeface="Noto Sans CJK KR"/>
+              </a:defRPr>
+            </a:pPr>
+            <a:r>
+              <a:t>실제 파일: agv_ws/src/agv_bringup/launch/agv_sim.launch.py</a:t>
             </a:r>
           </a:p>
         </p:txBody>
@@ -4365,8 +4610,8 @@
         </p:nvSpPr>
         <p:spPr>
           <a:xfrm>
-            <a:off x="731520" y="5440680"/>
-            <a:ext cx="10698480" cy="502920"/>
+            <a:off x="530352" y="1362456"/>
+            <a:ext cx="10972800" cy="182880"/>
           </a:xfrm>
           <a:prstGeom prst="rect">
             <a:avLst/>
@@ -4383,15 +4628,373 @@
               <a:spcAft>
                 <a:spcPts val="500"/>
               </a:spcAft>
+              <a:defRPr sz="1000" b="0">
+                <a:solidFill>
+                  <a:srgbClr val="17638C"/>
+                </a:solidFill>
+                <a:latin typeface="Noto Sans CJK KR"/>
+              </a:defRPr>
+            </a:pPr>
+            <a:r>
+              <a:t>처음 만들 때: mkdir -p agv_bringup/launch  # launch.py는 패키지 setup.py의 data_files에도 등록</a:t>
+            </a:r>
+          </a:p>
+        </p:txBody>
+      </p:sp>
+      <p:sp>
+        <p:nvSpPr>
+          <p:cNvPr id="9" name="Rounded Rectangle 8"/>
+          <p:cNvSpPr/>
+          <p:nvPr/>
+        </p:nvSpPr>
+        <p:spPr>
+          <a:xfrm>
+            <a:off x="502920" y="1627632"/>
+            <a:ext cx="5806440" cy="4416552"/>
+          </a:xfrm>
+          <a:prstGeom prst="roundRect">
+            <a:avLst/>
+          </a:prstGeom>
+          <a:solidFill>
+            <a:srgbClr val="141C2A"/>
+          </a:solidFill>
+          <a:ln>
+            <a:solidFill>
+              <a:srgbClr val="40506E"/>
+            </a:solidFill>
+          </a:ln>
+        </p:spPr>
+        <p:style>
+          <a:lnRef idx="1">
+            <a:schemeClr val="accent1"/>
+          </a:lnRef>
+          <a:fillRef idx="3">
+            <a:schemeClr val="accent1"/>
+          </a:fillRef>
+          <a:effectRef idx="2">
+            <a:schemeClr val="accent1"/>
+          </a:effectRef>
+          <a:fontRef idx="minor">
+            <a:schemeClr val="lt1"/>
+          </a:fontRef>
+        </p:style>
+        <p:txBody>
+          <a:bodyPr rtlCol="0" anchor="ctr" lIns="182880" tIns="137160"/>
+          <a:lstStyle/>
+          <a:p>
+            <a:pPr algn="ctr">
+              <a:spcAft>
+                <a:spcPts val="300"/>
+              </a:spcAft>
+              <a:defRPr sz="1000">
+                <a:solidFill>
+                  <a:srgbClr val="DFEDFF"/>
+                </a:solidFill>
+                <a:latin typeface="Noto Sans CJK KR"/>
+              </a:defRPr>
+            </a:pPr>
+            <a:r>
+              <a:t>DeclareLaunchArgument('rviz', default_value='true')</a:t>
+            </a:r>
+          </a:p>
+          <a:p>
+            <a:pPr>
+              <a:spcAft>
+                <a:spcPts val="300"/>
+              </a:spcAft>
+              <a:defRPr sz="1000">
+                <a:solidFill>
+                  <a:srgbClr val="DFEDFF"/>
+                </a:solidFill>
+                <a:latin typeface="Noto Sans CJK KR"/>
+              </a:defRPr>
+            </a:pPr>
+            <a:r>
+              <a:t>IncludeLaunchDescription(...gazebo.launch.py...)</a:t>
+            </a:r>
+          </a:p>
+          <a:p>
+            <a:pPr>
+              <a:spcAft>
+                <a:spcPts val="300"/>
+              </a:spcAft>
+              <a:defRPr sz="1000">
+                <a:solidFill>
+                  <a:srgbClr val="DFEDFF"/>
+                </a:solidFill>
+                <a:latin typeface="Noto Sans CJK KR"/>
+              </a:defRPr>
+            </a:pPr>
+            <a:r>
+              <a:t>Node(package='agv_sensors', executable='lidar_processor',</a:t>
+            </a:r>
+          </a:p>
+          <a:p>
+            <a:pPr>
+              <a:spcAft>
+                <a:spcPts val="300"/>
+              </a:spcAft>
+              <a:defRPr sz="1000">
+                <a:solidFill>
+                  <a:srgbClr val="DFEDFF"/>
+                </a:solidFill>
+                <a:latin typeface="Noto Sans CJK KR"/>
+              </a:defRPr>
+            </a:pPr>
+            <a:r>
+              <a:t>     parameters=[os.path.join(bringup, 'config', 'sensors.yaml')])</a:t>
+            </a:r>
+          </a:p>
+          <a:p>
+            <a:pPr>
+              <a:spcAft>
+                <a:spcPts val="300"/>
+              </a:spcAft>
+              <a:defRPr sz="1000">
+                <a:solidFill>
+                  <a:srgbClr val="DFEDFF"/>
+                </a:solidFill>
+                <a:latin typeface="Noto Sans CJK KR"/>
+              </a:defRPr>
+            </a:pPr>
+            <a:r>
+              <a:t>Node(package='agv_mission', executable='mission_manager',</a:t>
+            </a:r>
+          </a:p>
+          <a:p>
+            <a:pPr>
+              <a:spcAft>
+                <a:spcPts val="300"/>
+              </a:spcAft>
+              <a:defRPr sz="1000">
+                <a:solidFill>
+                  <a:srgbClr val="DFEDFF"/>
+                </a:solidFill>
+                <a:latin typeface="Noto Sans CJK KR"/>
+              </a:defRPr>
+            </a:pPr>
+            <a:r>
+              <a:t>     parameters=[os.path.join(bringup, 'config', 'mission.yaml')])</a:t>
+            </a:r>
+          </a:p>
+          <a:p>
+            <a:pPr>
+              <a:spcAft>
+                <a:spcPts val="300"/>
+              </a:spcAft>
+              <a:defRPr sz="1000">
+                <a:solidFill>
+                  <a:srgbClr val="DFEDFF"/>
+                </a:solidFill>
+                <a:latin typeface="Noto Sans CJK KR"/>
+              </a:defRPr>
+            </a:pPr>
+            <a:r>
+              <a:t>Node(package='agv_control', executable='safety_controller',</a:t>
+            </a:r>
+          </a:p>
+          <a:p>
+            <a:pPr>
+              <a:spcAft>
+                <a:spcPts val="300"/>
+              </a:spcAft>
+              <a:defRPr sz="1000">
+                <a:solidFill>
+                  <a:srgbClr val="DFEDFF"/>
+                </a:solidFill>
+                <a:latin typeface="Noto Sans CJK KR"/>
+              </a:defRPr>
+            </a:pPr>
+            <a:r>
+              <a:t>     parameters=[os.path.join(bringup, 'config', 'mission.yaml')])</a:t>
+            </a:r>
+          </a:p>
+        </p:txBody>
+      </p:sp>
+      <p:sp>
+        <p:nvSpPr>
+          <p:cNvPr id="10" name="TextBox 9"/>
+          <p:cNvSpPr txBox="1"/>
+          <p:nvPr/>
+        </p:nvSpPr>
+        <p:spPr>
+          <a:xfrm>
+            <a:off x="6537960" y="1627632"/>
+            <a:ext cx="4892040" cy="320040"/>
+          </a:xfrm>
+          <a:prstGeom prst="rect">
+            <a:avLst/>
+          </a:prstGeom>
+          <a:noFill/>
+        </p:spPr>
+        <p:txBody>
+          <a:bodyPr wrap="square" anchor="t">
+            <a:spAutoFit/>
+          </a:bodyPr>
+          <a:lstStyle/>
+          <a:p>
+            <a:pPr>
+              <a:spcAft>
+                <a:spcPts val="500"/>
+              </a:spcAft>
+              <a:defRPr sz="1600" b="1">
+                <a:solidFill>
+                  <a:srgbClr val="173E6F"/>
+                </a:solidFill>
+                <a:latin typeface="Noto Sans CJK KR"/>
+              </a:defRPr>
+            </a:pPr>
+            <a:r>
+              <a:t>만드는 순서</a:t>
+            </a:r>
+          </a:p>
+        </p:txBody>
+      </p:sp>
+      <p:sp>
+        <p:nvSpPr>
+          <p:cNvPr id="11" name="TextBox 10"/>
+          <p:cNvSpPr txBox="1"/>
+          <p:nvPr/>
+        </p:nvSpPr>
+        <p:spPr>
+          <a:xfrm>
+            <a:off x="6565392" y="1975104"/>
+            <a:ext cx="4800600" cy="2258568"/>
+          </a:xfrm>
+          <a:prstGeom prst="rect">
+            <a:avLst/>
+          </a:prstGeom>
+          <a:noFill/>
+        </p:spPr>
+        <p:txBody>
+          <a:bodyPr wrap="square" anchor="t">
+            <a:spAutoFit/>
+          </a:bodyPr>
+          <a:lstStyle/>
+          <a:p>
+            <a:pPr>
+              <a:spcAft>
+                <a:spcPts val="500"/>
+              </a:spcAft>
               <a:defRPr sz="1200" b="0">
                 <a:solidFill>
-                  <a:srgbClr val="3F5373"/>
-                </a:solidFill>
-                <a:latin typeface="Noto Sans CJK KR"/>
-              </a:defRPr>
-            </a:pPr>
-            <a:r>
-              <a:t>수치·토픽·방향을 바꿀 때는 해당 Block의 Mxx README에서 구현 파일과 기대 결과를 함께 확인합니다.</a:t>
+                  <a:srgbClr val="212B3D"/>
+                </a:solidFill>
+                <a:latin typeface="Noto Sans CJK KR"/>
+              </a:defRPr>
+            </a:pPr>
+            <a:r>
+              <a:t>• 1. gazebo launch를 IncludeLaunchDescription으로 포함합니다.</a:t>
+            </a:r>
+          </a:p>
+          <a:p>
+            <a:pPr>
+              <a:spcAft>
+                <a:spcPts val="500"/>
+              </a:spcAft>
+              <a:defRPr sz="1200" b="0">
+                <a:solidFill>
+                  <a:srgbClr val="212B3D"/>
+                </a:solidFill>
+                <a:latin typeface="Noto Sans CJK KR"/>
+              </a:defRPr>
+            </a:pPr>
+            <a:r>
+              <a:t>• 2. 각 Node에 해당 YAML 파일을 parameters로 전달합니다.</a:t>
+            </a:r>
+          </a:p>
+          <a:p>
+            <a:pPr>
+              <a:spcAft>
+                <a:spcPts val="500"/>
+              </a:spcAft>
+              <a:defRPr sz="1200" b="0">
+                <a:solidFill>
+                  <a:srgbClr val="212B3D"/>
+                </a:solidFill>
+                <a:latin typeface="Noto Sans CJK KR"/>
+              </a:defRPr>
+            </a:pPr>
+            <a:r>
+              <a:t>• 3. rviz launch argument로 GUI를 켜거나 끄고, 실행 로그에서 각 process가 시작됐는지 확인합니다.</a:t>
+            </a:r>
+          </a:p>
+        </p:txBody>
+      </p:sp>
+      <p:sp>
+        <p:nvSpPr>
+          <p:cNvPr id="12" name="TextBox 11"/>
+          <p:cNvSpPr txBox="1"/>
+          <p:nvPr/>
+        </p:nvSpPr>
+        <p:spPr>
+          <a:xfrm>
+            <a:off x="6565392" y="4480560"/>
+            <a:ext cx="4800600" cy="320040"/>
+          </a:xfrm>
+          <a:prstGeom prst="rect">
+            <a:avLst/>
+          </a:prstGeom>
+          <a:noFill/>
+        </p:spPr>
+        <p:txBody>
+          <a:bodyPr wrap="square" anchor="t">
+            <a:spAutoFit/>
+          </a:bodyPr>
+          <a:lstStyle/>
+          <a:p>
+            <a:pPr>
+              <a:spcAft>
+                <a:spcPts val="500"/>
+              </a:spcAft>
+              <a:defRPr sz="1600" b="1">
+                <a:solidFill>
+                  <a:srgbClr val="173E6F"/>
+                </a:solidFill>
+                <a:latin typeface="Noto Sans CJK KR"/>
+              </a:defRPr>
+            </a:pPr>
+            <a:r>
+              <a:t>실행하면 이렇게 됩니다</a:t>
+            </a:r>
+          </a:p>
+        </p:txBody>
+      </p:sp>
+      <p:sp>
+        <p:nvSpPr>
+          <p:cNvPr id="13" name="TextBox 12"/>
+          <p:cNvSpPr txBox="1"/>
+          <p:nvPr/>
+        </p:nvSpPr>
+        <p:spPr>
+          <a:xfrm>
+            <a:off x="6565392" y="4892040"/>
+            <a:ext cx="4800600" cy="822960"/>
+          </a:xfrm>
+          <a:prstGeom prst="rect">
+            <a:avLst/>
+          </a:prstGeom>
+          <a:noFill/>
+        </p:spPr>
+        <p:txBody>
+          <a:bodyPr wrap="square" anchor="t">
+            <a:spAutoFit/>
+          </a:bodyPr>
+          <a:lstStyle/>
+          <a:p>
+            <a:pPr>
+              <a:spcAft>
+                <a:spcPts val="500"/>
+              </a:spcAft>
+              <a:defRPr sz="1200" b="0">
+                <a:solidFill>
+                  <a:srgbClr val="212B3D"/>
+                </a:solidFill>
+                <a:latin typeface="Noto Sans CJK KR"/>
+              </a:defRPr>
+            </a:pPr>
+            <a:r>
+              <a:t>ros2 launch 한 번으로 Gazebo·bridge·TF·센서·미션·안전 노드가 함께 시작됩니다.</a:t>
             </a:r>
           </a:p>
         </p:txBody>
@@ -4530,7 +5133,7 @@
               </a:defRPr>
             </a:pPr>
             <a:r>
-              <a:t>실제 실행 결과</a:t>
+              <a:t>명령어 실행 순서</a:t>
             </a:r>
           </a:p>
         </p:txBody>
@@ -4574,30 +5177,238 @@
           </a:p>
         </p:txBody>
       </p:sp>
-      <p:pic>
-        <p:nvPicPr>
-          <p:cNvPr id="6" name="Picture 5" descr="block_f_actual_terminal.png"/>
-          <p:cNvPicPr>
-            <a:picLocks noChangeAspect="1"/>
-          </p:cNvPicPr>
+      <p:sp>
+        <p:nvSpPr>
+          <p:cNvPr id="6" name="TextBox 5"/>
+          <p:cNvSpPr txBox="1"/>
           <p:nvPr/>
-        </p:nvPicPr>
-        <p:blipFill>
-          <a:blip r:embed="rId2"/>
-          <a:stretch>
-            <a:fillRect/>
-          </a:stretch>
-        </p:blipFill>
-        <p:spPr>
-          <a:xfrm>
-            <a:off x="411480" y="932688"/>
-            <a:ext cx="11365992" cy="5422392"/>
+        </p:nvSpPr>
+        <p:spPr>
+          <a:xfrm>
+            <a:off x="594360" y="932688"/>
+            <a:ext cx="10972800" cy="320040"/>
           </a:xfrm>
           <a:prstGeom prst="rect">
             <a:avLst/>
           </a:prstGeom>
-        </p:spPr>
-      </p:pic>
+          <a:noFill/>
+        </p:spPr>
+        <p:txBody>
+          <a:bodyPr wrap="square" anchor="t">
+            <a:spAutoFit/>
+          </a:bodyPr>
+          <a:lstStyle/>
+          <a:p>
+            <a:pPr>
+              <a:spcAft>
+                <a:spcPts val="500"/>
+              </a:spcAft>
+              <a:defRPr sz="2100" b="1">
+                <a:solidFill>
+                  <a:srgbClr val="173E6F"/>
+                </a:solidFill>
+                <a:latin typeface="Noto Sans CJK KR"/>
+              </a:defRPr>
+            </a:pPr>
+            <a:r>
+              <a:t>권장 실행 순서</a:t>
+            </a:r>
+          </a:p>
+        </p:txBody>
+      </p:sp>
+      <p:sp>
+        <p:nvSpPr>
+          <p:cNvPr id="7" name="Rounded Rectangle 6"/>
+          <p:cNvSpPr/>
+          <p:nvPr/>
+        </p:nvSpPr>
+        <p:spPr>
+          <a:xfrm>
+            <a:off x="594360" y="1417320"/>
+            <a:ext cx="10972800" cy="4526280"/>
+          </a:xfrm>
+          <a:prstGeom prst="roundRect">
+            <a:avLst/>
+          </a:prstGeom>
+          <a:solidFill>
+            <a:srgbClr val="141C2A"/>
+          </a:solidFill>
+          <a:ln>
+            <a:solidFill>
+              <a:srgbClr val="40506E"/>
+            </a:solidFill>
+          </a:ln>
+        </p:spPr>
+        <p:style>
+          <a:lnRef idx="1">
+            <a:schemeClr val="accent1"/>
+          </a:lnRef>
+          <a:fillRef idx="3">
+            <a:schemeClr val="accent1"/>
+          </a:fillRef>
+          <a:effectRef idx="2">
+            <a:schemeClr val="accent1"/>
+          </a:effectRef>
+          <a:fontRef idx="minor">
+            <a:schemeClr val="lt1"/>
+          </a:fontRef>
+        </p:style>
+        <p:txBody>
+          <a:bodyPr rtlCol="0" anchor="ctr" lIns="237744" tIns="182880"/>
+          <a:lstStyle/>
+          <a:p>
+            <a:pPr algn="ctr">
+              <a:spcAft>
+                <a:spcPts val="700"/>
+              </a:spcAft>
+              <a:defRPr sz="1100">
+                <a:solidFill>
+                  <a:srgbClr val="DFEDFF"/>
+                </a:solidFill>
+                <a:latin typeface="Noto Sans CJK KR"/>
+              </a:defRPr>
+            </a:pPr>
+            <a:r>
+              <a:t>export PATH=/usr/bin:/bin:$PATH  # Miniconda 사용 시</a:t>
+            </a:r>
+          </a:p>
+          <a:p>
+            <a:pPr>
+              <a:spcAft>
+                <a:spcPts val="700"/>
+              </a:spcAft>
+              <a:defRPr sz="1100">
+                <a:solidFill>
+                  <a:srgbClr val="DFEDFF"/>
+                </a:solidFill>
+                <a:latin typeface="Noto Sans CJK KR"/>
+              </a:defRPr>
+            </a:pPr>
+            <a:r>
+              <a:t>source /opt/ros/jazzy/setup.bash</a:t>
+            </a:r>
+          </a:p>
+          <a:p>
+            <a:pPr>
+              <a:spcAft>
+                <a:spcPts val="700"/>
+              </a:spcAft>
+              <a:defRPr sz="1100">
+                <a:solidFill>
+                  <a:srgbClr val="DFEDFF"/>
+                </a:solidFill>
+                <a:latin typeface="Noto Sans CJK KR"/>
+              </a:defRPr>
+            </a:pPr>
+            <a:r>
+              <a:t>cd /home/lab4090/ros2_curri/agv_ws</a:t>
+            </a:r>
+          </a:p>
+          <a:p>
+            <a:pPr>
+              <a:spcAft>
+                <a:spcPts val="700"/>
+              </a:spcAft>
+              <a:defRPr sz="1100">
+                <a:solidFill>
+                  <a:srgbClr val="DFEDFF"/>
+                </a:solidFill>
+                <a:latin typeface="Noto Sans CJK KR"/>
+              </a:defRPr>
+            </a:pPr>
+            <a:r>
+              <a:t>colcon build --symlink-install --cmake-args -DPython3_EXECUTABLE=/usr/bin/python3</a:t>
+            </a:r>
+          </a:p>
+          <a:p>
+            <a:pPr>
+              <a:spcAft>
+                <a:spcPts val="700"/>
+              </a:spcAft>
+              <a:defRPr sz="1100">
+                <a:solidFill>
+                  <a:srgbClr val="DFEDFF"/>
+                </a:solidFill>
+                <a:latin typeface="Noto Sans CJK KR"/>
+              </a:defRPr>
+            </a:pPr>
+            <a:r>
+              <a:t>source install/setup.bash</a:t>
+            </a:r>
+          </a:p>
+          <a:p>
+            <a:pPr>
+              <a:spcAft>
+                <a:spcPts val="700"/>
+              </a:spcAft>
+              <a:defRPr sz="1100">
+                <a:solidFill>
+                  <a:srgbClr val="DFEDFF"/>
+                </a:solidFill>
+                <a:latin typeface="Noto Sans CJK KR"/>
+              </a:defRPr>
+            </a:pPr>
+            <a:r>
+              <a:t>ros2 launch agv_bringup agv_sim.launch.py</a:t>
+            </a:r>
+          </a:p>
+          <a:p>
+            <a:pPr>
+              <a:spcAft>
+                <a:spcPts val="700"/>
+              </a:spcAft>
+              <a:defRPr sz="1100">
+                <a:solidFill>
+                  <a:srgbClr val="DFEDFF"/>
+                </a:solidFill>
+                <a:latin typeface="Noto Sans CJK KR"/>
+              </a:defRPr>
+            </a:pPr>
+            <a:r>
+              <a:t>ros2 bag record -o ~/agv_bag_01 /scan /imu/data /odom /camera/image_raw</a:t>
+            </a:r>
+          </a:p>
+        </p:txBody>
+      </p:sp>
+      <p:sp>
+        <p:nvSpPr>
+          <p:cNvPr id="8" name="TextBox 7"/>
+          <p:cNvSpPr txBox="1"/>
+          <p:nvPr/>
+        </p:nvSpPr>
+        <p:spPr>
+          <a:xfrm>
+            <a:off x="685800" y="6089904"/>
+            <a:ext cx="10789920" cy="256032"/>
+          </a:xfrm>
+          <a:prstGeom prst="rect">
+            <a:avLst/>
+          </a:prstGeom>
+          <a:noFill/>
+        </p:spPr>
+        <p:txBody>
+          <a:bodyPr wrap="square" anchor="t">
+            <a:spAutoFit/>
+          </a:bodyPr>
+          <a:lstStyle/>
+          <a:p>
+            <a:pPr>
+              <a:spcAft>
+                <a:spcPts val="500"/>
+              </a:spcAft>
+              <a:defRPr sz="1000" b="0">
+                <a:solidFill>
+                  <a:srgbClr val="505C70"/>
+                </a:solidFill>
+                <a:latin typeface="Noto Sans CJK KR"/>
+              </a:defRPr>
+            </a:pPr>
+            <a:r>
+              <a:t>명령은 Block README의 순서와 동일합니다. 새 터미널에서도 ROS와 workspace를 source해야 합니다.</a:t>
+            </a:r>
+          </a:p>
+        </p:txBody>
+      </p:sp>
     </p:spTree>
   </p:cSld>
   <p:clrMapOvr>
@@ -4732,7 +5543,7 @@
               </a:defRPr>
             </a:pPr>
             <a:r>
-              <a:t>확인 기준과 다음 단계</a:t>
+              <a:t>명령어 동작과 설정 포인트</a:t>
             </a:r>
           </a:p>
         </p:txBody>
@@ -4810,7 +5621,7 @@
               </a:defRPr>
             </a:pPr>
             <a:r>
-              <a:t>통과 기준</a:t>
+              <a:t>이 명령이 실제로 하는 일</a:t>
             </a:r>
           </a:p>
         </p:txBody>
@@ -4849,7 +5660,536 @@
               </a:defRPr>
             </a:pPr>
             <a:r>
-              <a:t>• 8개 패키지와 agv_sim.launch.py 인자가 출력되고 rosdep이 All system dependencies have been satisfied를 표시하면 재현 가능한 최종 구조다.</a:t>
+              <a:t>• colcon build는 8개 패키지를 의존성 순서로 install하고, source는 새 overlay를 현재 셸에 적용한다.</a:t>
+            </a:r>
+          </a:p>
+          <a:p>
+            <a:pPr>
+              <a:spcAft>
+                <a:spcPts val="500"/>
+              </a:spcAft>
+              <a:defRPr sz="1500" b="0">
+                <a:solidFill>
+                  <a:srgbClr val="212B3D"/>
+                </a:solidFill>
+                <a:latin typeface="Noto Sans CJK KR"/>
+              </a:defRPr>
+            </a:pPr>
+            <a:r>
+              <a:t>• agv_sim.launch.py는 Gazebo·bridge·TF·sensor·mission·safety를 한 명령으로 조립한다. rviz:=false로 GUI만 제외할 수 있다.</a:t>
+            </a:r>
+          </a:p>
+          <a:p>
+            <a:pPr>
+              <a:spcAft>
+                <a:spcPts val="500"/>
+              </a:spcAft>
+              <a:defRPr sz="1500" b="0">
+                <a:solidFill>
+                  <a:srgbClr val="212B3D"/>
+                </a:solidFill>
+                <a:latin typeface="Noto Sans CJK KR"/>
+              </a:defRPr>
+            </a:pPr>
+            <a:r>
+              <a:t>• ros2 bag record는 지정 토픽을 기록하며, --clock 재생은 use_sim_time 노드와 함께 사용한다.</a:t>
+            </a:r>
+          </a:p>
+        </p:txBody>
+      </p:sp>
+      <p:sp>
+        <p:nvSpPr>
+          <p:cNvPr id="8" name="TextBox 7"/>
+          <p:cNvSpPr txBox="1"/>
+          <p:nvPr/>
+        </p:nvSpPr>
+        <p:spPr>
+          <a:xfrm>
+            <a:off x="731520" y="5440680"/>
+            <a:ext cx="10698480" cy="502920"/>
+          </a:xfrm>
+          <a:prstGeom prst="rect">
+            <a:avLst/>
+          </a:prstGeom>
+          <a:noFill/>
+        </p:spPr>
+        <p:txBody>
+          <a:bodyPr wrap="square" anchor="t">
+            <a:spAutoFit/>
+          </a:bodyPr>
+          <a:lstStyle/>
+          <a:p>
+            <a:pPr>
+              <a:spcAft>
+                <a:spcPts val="500"/>
+              </a:spcAft>
+              <a:defRPr sz="1200" b="0">
+                <a:solidFill>
+                  <a:srgbClr val="3F5373"/>
+                </a:solidFill>
+                <a:latin typeface="Noto Sans CJK KR"/>
+              </a:defRPr>
+            </a:pPr>
+            <a:r>
+              <a:t>수치·토픽·방향을 바꿀 때는 해당 Block의 Mxx README에서 구현 파일과 기대 결과를 함께 확인합니다.</a:t>
+            </a:r>
+          </a:p>
+        </p:txBody>
+      </p:sp>
+    </p:spTree>
+  </p:cSld>
+  <p:clrMapOvr>
+    <a:masterClrMapping/>
+  </p:clrMapOvr>
+</p:sld>
+</file>
+
+<file path=ppt/slides/slide7.xml><?xml version="1.0" encoding="utf-8"?>
+<p:sld xmlns:a="http://schemas.openxmlformats.org/drawingml/2006/main" xmlns:p="http://schemas.openxmlformats.org/presentationml/2006/main" xmlns:r="http://schemas.openxmlformats.org/officeDocument/2006/relationships">
+  <p:cSld>
+    <p:spTree>
+      <p:nvGrpSpPr>
+        <p:cNvPr id="1" name=""/>
+        <p:cNvGrpSpPr/>
+        <p:nvPr/>
+      </p:nvGrpSpPr>
+      <p:grpSpPr/>
+      <p:sp>
+        <p:nvSpPr>
+          <p:cNvPr id="2" name="Rectangle 1"/>
+          <p:cNvSpPr/>
+          <p:nvPr/>
+        </p:nvSpPr>
+        <p:spPr>
+          <a:xfrm>
+            <a:off x="0" y="0"/>
+            <a:ext cx="12191695" cy="749808"/>
+          </a:xfrm>
+          <a:prstGeom prst="rect">
+            <a:avLst/>
+          </a:prstGeom>
+          <a:solidFill>
+            <a:srgbClr val="173E6F"/>
+          </a:solidFill>
+          <a:ln>
+            <a:noFill/>
+          </a:ln>
+        </p:spPr>
+        <p:style>
+          <a:lnRef idx="1">
+            <a:schemeClr val="accent1"/>
+          </a:lnRef>
+          <a:fillRef idx="3">
+            <a:schemeClr val="accent1"/>
+          </a:fillRef>
+          <a:effectRef idx="2">
+            <a:schemeClr val="accent1"/>
+          </a:effectRef>
+          <a:fontRef idx="minor">
+            <a:schemeClr val="lt1"/>
+          </a:fontRef>
+        </p:style>
+        <p:txBody>
+          <a:bodyPr rtlCol="0" anchor="ctr"/>
+          <a:lstStyle/>
+          <a:p>
+            <a:pPr algn="ctr"/>
+          </a:p>
+        </p:txBody>
+      </p:sp>
+      <p:sp>
+        <p:nvSpPr>
+          <p:cNvPr id="3" name="TextBox 2"/>
+          <p:cNvSpPr txBox="1"/>
+          <p:nvPr/>
+        </p:nvSpPr>
+        <p:spPr>
+          <a:xfrm>
+            <a:off x="411480" y="137160"/>
+            <a:ext cx="8046720" cy="320040"/>
+          </a:xfrm>
+          <a:prstGeom prst="rect">
+            <a:avLst/>
+          </a:prstGeom>
+          <a:noFill/>
+        </p:spPr>
+        <p:txBody>
+          <a:bodyPr wrap="square" anchor="t">
+            <a:spAutoFit/>
+          </a:bodyPr>
+          <a:lstStyle/>
+          <a:p>
+            <a:pPr>
+              <a:spcAft>
+                <a:spcPts val="500"/>
+              </a:spcAft>
+              <a:defRPr sz="2500" b="1">
+                <a:solidFill>
+                  <a:srgbClr val="FFFFFF"/>
+                </a:solidFill>
+                <a:latin typeface="Noto Sans CJK KR"/>
+              </a:defRPr>
+            </a:pPr>
+            <a:r>
+              <a:t>Block F — 통합·재현·최종 프로젝트</a:t>
+            </a:r>
+          </a:p>
+        </p:txBody>
+      </p:sp>
+      <p:sp>
+        <p:nvSpPr>
+          <p:cNvPr id="4" name="TextBox 3"/>
+          <p:cNvSpPr txBox="1"/>
+          <p:nvPr/>
+        </p:nvSpPr>
+        <p:spPr>
+          <a:xfrm>
+            <a:off x="8321040" y="182880"/>
+            <a:ext cx="3474720" cy="256032"/>
+          </a:xfrm>
+          <a:prstGeom prst="rect">
+            <a:avLst/>
+          </a:prstGeom>
+          <a:noFill/>
+        </p:spPr>
+        <p:txBody>
+          <a:bodyPr wrap="square" anchor="t">
+            <a:spAutoFit/>
+          </a:bodyPr>
+          <a:lstStyle/>
+          <a:p>
+            <a:pPr>
+              <a:spcAft>
+                <a:spcPts val="500"/>
+              </a:spcAft>
+              <a:defRPr sz="1000" b="0">
+                <a:solidFill>
+                  <a:srgbClr val="DCEAFC"/>
+                </a:solidFill>
+                <a:latin typeface="Noto Sans CJK KR"/>
+              </a:defRPr>
+            </a:pPr>
+            <a:r>
+              <a:t>실제 실행 결과</a:t>
+            </a:r>
+          </a:p>
+        </p:txBody>
+      </p:sp>
+      <p:sp>
+        <p:nvSpPr>
+          <p:cNvPr id="5" name="TextBox 4"/>
+          <p:cNvSpPr txBox="1"/>
+          <p:nvPr/>
+        </p:nvSpPr>
+        <p:spPr>
+          <a:xfrm>
+            <a:off x="411480" y="6556248"/>
+            <a:ext cx="11247120" cy="164592"/>
+          </a:xfrm>
+          <a:prstGeom prst="rect">
+            <a:avLst/>
+          </a:prstGeom>
+          <a:noFill/>
+        </p:spPr>
+        <p:txBody>
+          <a:bodyPr wrap="square" anchor="t">
+            <a:spAutoFit/>
+          </a:bodyPr>
+          <a:lstStyle/>
+          <a:p>
+            <a:pPr>
+              <a:spcAft>
+                <a:spcPts val="500"/>
+              </a:spcAft>
+              <a:defRPr sz="1000" b="0">
+                <a:solidFill>
+                  <a:srgbClr val="667080"/>
+                </a:solidFill>
+                <a:latin typeface="Noto Sans CJK KR"/>
+              </a:defRPr>
+            </a:pPr>
+            <a:r>
+              <a:t>ROS 2 + Gazebo AGV 실습 · 모든 텍스트 최소 10pt</a:t>
+            </a:r>
+          </a:p>
+        </p:txBody>
+      </p:sp>
+      <p:pic>
+        <p:nvPicPr>
+          <p:cNvPr id="6" name="Picture 5" descr="block_f_actual_terminal.png"/>
+          <p:cNvPicPr>
+            <a:picLocks noChangeAspect="1"/>
+          </p:cNvPicPr>
+          <p:nvPr/>
+        </p:nvPicPr>
+        <p:blipFill>
+          <a:blip r:embed="rId2"/>
+          <a:stretch>
+            <a:fillRect/>
+          </a:stretch>
+        </p:blipFill>
+        <p:spPr>
+          <a:xfrm>
+            <a:off x="411480" y="932688"/>
+            <a:ext cx="11365992" cy="5422392"/>
+          </a:xfrm>
+          <a:prstGeom prst="rect">
+            <a:avLst/>
+          </a:prstGeom>
+        </p:spPr>
+      </p:pic>
+    </p:spTree>
+  </p:cSld>
+  <p:clrMapOvr>
+    <a:masterClrMapping/>
+  </p:clrMapOvr>
+</p:sld>
+</file>
+
+<file path=ppt/slides/slide8.xml><?xml version="1.0" encoding="utf-8"?>
+<p:sld xmlns:a="http://schemas.openxmlformats.org/drawingml/2006/main" xmlns:p="http://schemas.openxmlformats.org/presentationml/2006/main" xmlns:r="http://schemas.openxmlformats.org/officeDocument/2006/relationships">
+  <p:cSld>
+    <p:spTree>
+      <p:nvGrpSpPr>
+        <p:cNvPr id="1" name=""/>
+        <p:cNvGrpSpPr/>
+        <p:nvPr/>
+      </p:nvGrpSpPr>
+      <p:grpSpPr/>
+      <p:sp>
+        <p:nvSpPr>
+          <p:cNvPr id="2" name="Rectangle 1"/>
+          <p:cNvSpPr/>
+          <p:nvPr/>
+        </p:nvSpPr>
+        <p:spPr>
+          <a:xfrm>
+            <a:off x="0" y="0"/>
+            <a:ext cx="12191695" cy="749808"/>
+          </a:xfrm>
+          <a:prstGeom prst="rect">
+            <a:avLst/>
+          </a:prstGeom>
+          <a:solidFill>
+            <a:srgbClr val="173E6F"/>
+          </a:solidFill>
+          <a:ln>
+            <a:noFill/>
+          </a:ln>
+        </p:spPr>
+        <p:style>
+          <a:lnRef idx="1">
+            <a:schemeClr val="accent1"/>
+          </a:lnRef>
+          <a:fillRef idx="3">
+            <a:schemeClr val="accent1"/>
+          </a:fillRef>
+          <a:effectRef idx="2">
+            <a:schemeClr val="accent1"/>
+          </a:effectRef>
+          <a:fontRef idx="minor">
+            <a:schemeClr val="lt1"/>
+          </a:fontRef>
+        </p:style>
+        <p:txBody>
+          <a:bodyPr rtlCol="0" anchor="ctr"/>
+          <a:lstStyle/>
+          <a:p>
+            <a:pPr algn="ctr"/>
+          </a:p>
+        </p:txBody>
+      </p:sp>
+      <p:sp>
+        <p:nvSpPr>
+          <p:cNvPr id="3" name="TextBox 2"/>
+          <p:cNvSpPr txBox="1"/>
+          <p:nvPr/>
+        </p:nvSpPr>
+        <p:spPr>
+          <a:xfrm>
+            <a:off x="411480" y="137160"/>
+            <a:ext cx="8046720" cy="320040"/>
+          </a:xfrm>
+          <a:prstGeom prst="rect">
+            <a:avLst/>
+          </a:prstGeom>
+          <a:noFill/>
+        </p:spPr>
+        <p:txBody>
+          <a:bodyPr wrap="square" anchor="t">
+            <a:spAutoFit/>
+          </a:bodyPr>
+          <a:lstStyle/>
+          <a:p>
+            <a:pPr>
+              <a:spcAft>
+                <a:spcPts val="500"/>
+              </a:spcAft>
+              <a:defRPr sz="2500" b="1">
+                <a:solidFill>
+                  <a:srgbClr val="FFFFFF"/>
+                </a:solidFill>
+                <a:latin typeface="Noto Sans CJK KR"/>
+              </a:defRPr>
+            </a:pPr>
+            <a:r>
+              <a:t>Block F — 통합·재현·최종 프로젝트</a:t>
+            </a:r>
+          </a:p>
+        </p:txBody>
+      </p:sp>
+      <p:sp>
+        <p:nvSpPr>
+          <p:cNvPr id="4" name="TextBox 3"/>
+          <p:cNvSpPr txBox="1"/>
+          <p:nvPr/>
+        </p:nvSpPr>
+        <p:spPr>
+          <a:xfrm>
+            <a:off x="8321040" y="182880"/>
+            <a:ext cx="3474720" cy="256032"/>
+          </a:xfrm>
+          <a:prstGeom prst="rect">
+            <a:avLst/>
+          </a:prstGeom>
+          <a:noFill/>
+        </p:spPr>
+        <p:txBody>
+          <a:bodyPr wrap="square" anchor="t">
+            <a:spAutoFit/>
+          </a:bodyPr>
+          <a:lstStyle/>
+          <a:p>
+            <a:pPr>
+              <a:spcAft>
+                <a:spcPts val="500"/>
+              </a:spcAft>
+              <a:defRPr sz="1000" b="0">
+                <a:solidFill>
+                  <a:srgbClr val="DCEAFC"/>
+                </a:solidFill>
+                <a:latin typeface="Noto Sans CJK KR"/>
+              </a:defRPr>
+            </a:pPr>
+            <a:r>
+              <a:t>확인 기준과 다음 단계</a:t>
+            </a:r>
+          </a:p>
+        </p:txBody>
+      </p:sp>
+      <p:sp>
+        <p:nvSpPr>
+          <p:cNvPr id="5" name="TextBox 4"/>
+          <p:cNvSpPr txBox="1"/>
+          <p:nvPr/>
+        </p:nvSpPr>
+        <p:spPr>
+          <a:xfrm>
+            <a:off x="411480" y="6556248"/>
+            <a:ext cx="11247120" cy="164592"/>
+          </a:xfrm>
+          <a:prstGeom prst="rect">
+            <a:avLst/>
+          </a:prstGeom>
+          <a:noFill/>
+        </p:spPr>
+        <p:txBody>
+          <a:bodyPr wrap="square" anchor="t">
+            <a:spAutoFit/>
+          </a:bodyPr>
+          <a:lstStyle/>
+          <a:p>
+            <a:pPr>
+              <a:spcAft>
+                <a:spcPts val="500"/>
+              </a:spcAft>
+              <a:defRPr sz="1000" b="0">
+                <a:solidFill>
+                  <a:srgbClr val="667080"/>
+                </a:solidFill>
+                <a:latin typeface="Noto Sans CJK KR"/>
+              </a:defRPr>
+            </a:pPr>
+            <a:r>
+              <a:t>ROS 2 + Gazebo AGV 실습 · 모든 텍스트 최소 10pt</a:t>
+            </a:r>
+          </a:p>
+        </p:txBody>
+      </p:sp>
+      <p:sp>
+        <p:nvSpPr>
+          <p:cNvPr id="6" name="TextBox 5"/>
+          <p:cNvSpPr txBox="1"/>
+          <p:nvPr/>
+        </p:nvSpPr>
+        <p:spPr>
+          <a:xfrm>
+            <a:off x="594360" y="960120"/>
+            <a:ext cx="10972800" cy="411480"/>
+          </a:xfrm>
+          <a:prstGeom prst="rect">
+            <a:avLst/>
+          </a:prstGeom>
+          <a:noFill/>
+        </p:spPr>
+        <p:txBody>
+          <a:bodyPr wrap="square" anchor="t">
+            <a:spAutoFit/>
+          </a:bodyPr>
+          <a:lstStyle/>
+          <a:p>
+            <a:pPr>
+              <a:spcAft>
+                <a:spcPts val="500"/>
+              </a:spcAft>
+              <a:defRPr sz="2100" b="1">
+                <a:solidFill>
+                  <a:srgbClr val="173E6F"/>
+                </a:solidFill>
+                <a:latin typeface="Noto Sans CJK KR"/>
+              </a:defRPr>
+            </a:pPr>
+            <a:r>
+              <a:t>통과 기준</a:t>
+            </a:r>
+          </a:p>
+        </p:txBody>
+      </p:sp>
+      <p:sp>
+        <p:nvSpPr>
+          <p:cNvPr id="7" name="TextBox 6"/>
+          <p:cNvSpPr txBox="1"/>
+          <p:nvPr/>
+        </p:nvSpPr>
+        <p:spPr>
+          <a:xfrm>
+            <a:off x="731520" y="1508760"/>
+            <a:ext cx="10698480" cy="4480560"/>
+          </a:xfrm>
+          <a:prstGeom prst="rect">
+            <a:avLst/>
+          </a:prstGeom>
+          <a:noFill/>
+        </p:spPr>
+        <p:txBody>
+          <a:bodyPr wrap="square" anchor="t">
+            <a:spAutoFit/>
+          </a:bodyPr>
+          <a:lstStyle/>
+          <a:p>
+            <a:pPr>
+              <a:spcAft>
+                <a:spcPts val="500"/>
+              </a:spcAft>
+              <a:defRPr sz="1500" b="0">
+                <a:solidFill>
+                  <a:srgbClr val="212B3D"/>
+                </a:solidFill>
+                <a:latin typeface="Noto Sans CJK KR"/>
+              </a:defRPr>
+            </a:pPr>
+            <a:r>
+              <a:t>• 8개 최종 AGV 패키지와 별도 C++ 교육 예제 1개, agv_sim.launch.py 인자가 출력되고 rosdep이 All system dependencies have been satisfied를 표시하면 재현 가능한 최종 구조다.</a:t>
             </a:r>
           </a:p>
           <a:p>
